--- a/templates/provisional-green.pptx
+++ b/templates/provisional-green.pptx
@@ -20,6 +20,7 @@
     <p:sldId id="268" r:id="rId20"/>
     <p:sldId id="269" r:id="rId21"/>
     <p:sldId id="270" r:id="rId22"/>
+    <p:sldId id="271" r:id="rId23"/>
   </p:sldIdLst>
   <p:sldSz cx="12192000" cy="6858000" type="screen4x3"/>
   <p:notesSz cx="6858000" cy="9144000"/>
@@ -601,7 +602,7 @@
           </a:p>
           <a:p>
             <a:r>
-              <a:t>role: [closing]</a:t>
+              <a:t>role: [closing, cover]</a:t>
             </a:r>
           </a:p>
           <a:p>
@@ -1032,6 +1033,91 @@
           <a:p>
             <a:r>
               <a:t>label: 写真＋本文B（見出しと要点3つ）</a:t>
+            </a:r>
+          </a:p>
+        </p:txBody>
+      </p:sp>
+      <p:sp>
+        <p:nvSpPr>
+          <p:cNvPr id="4" name="Slide Number Placeholder 3"/>
+          <p:cNvSpPr>
+            <a:spLocks noGrp="1"/>
+          </p:cNvSpPr>
+          <p:nvPr>
+            <p:ph type="sldNum" idx="5" sz="quarter"/>
+          </p:nvPr>
+        </p:nvSpPr>
+        <p:spPr/>
+      </p:sp>
+    </p:spTree>
+  </p:cSld>
+  <p:clrMapOvr>
+    <a:masterClrMapping/>
+  </p:clrMapOvr>
+</p:notes>
+</file>
+
+<file path=ppt/notesSlides/notesSlide16.xml><?xml version="1.0" encoding="utf-8"?>
+<p:notes xmlns:a="http://schemas.openxmlformats.org/drawingml/2006/main" xmlns:p="http://schemas.openxmlformats.org/presentationml/2006/main" xmlns:r="http://schemas.openxmlformats.org/officeDocument/2006/relationships">
+  <p:cSld>
+    <p:spTree>
+      <p:nvGrpSpPr>
+        <p:cNvPr id="1" name=""/>
+        <p:cNvGrpSpPr/>
+        <p:nvPr/>
+      </p:nvGrpSpPr>
+      <p:grpSpPr>
+        <a:xfrm>
+          <a:off x="0" y="0"/>
+          <a:ext cx="0" cy="0"/>
+          <a:chOff x="0" y="0"/>
+          <a:chExt cx="0" cy="0"/>
+        </a:xfrm>
+      </p:grpSpPr>
+      <p:sp>
+        <p:nvSpPr>
+          <p:cNvPr id="2" name="Slide Image Placeholder 1"/>
+          <p:cNvSpPr>
+            <a:spLocks noGrp="1"/>
+          </p:cNvSpPr>
+          <p:nvPr>
+            <p:ph type="sldImg" idx="2"/>
+          </p:nvPr>
+        </p:nvSpPr>
+        <p:spPr/>
+      </p:sp>
+      <p:sp>
+        <p:nvSpPr>
+          <p:cNvPr id="3" name="Notes Placeholder 2"/>
+          <p:cNvSpPr>
+            <a:spLocks noGrp="1"/>
+          </p:cNvSpPr>
+          <p:nvPr>
+            <p:ph type="body" idx="3" sz="quarter"/>
+          </p:nvPr>
+        </p:nvSpPr>
+        <p:spPr/>
+        <p:txBody>
+          <a:bodyPr/>
+          <a:lstStyle/>
+          <a:p>
+            <a:r>
+              <a:t>type: cover</a:t>
+            </a:r>
+          </a:p>
+          <a:p>
+            <a:r>
+              <a:t>variant: "plain"</a:t>
+            </a:r>
+          </a:p>
+          <a:p>
+            <a:r>
+              <a:t>role: [cover]</a:t>
+            </a:r>
+          </a:p>
+          <a:p>
+            <a:r>
+              <a:t>label: 表紙（写真＋見出しだけ）</a:t>
             </a:r>
           </a:p>
         </p:txBody>
@@ -8784,6 +8870,358 @@
 </p:sld>
 </file>
 
+<file path=ppt/slides/slide16.xml><?xml version="1.0" encoding="utf-8"?>
+<p:sld xmlns:a="http://schemas.openxmlformats.org/drawingml/2006/main" xmlns:p="http://schemas.openxmlformats.org/presentationml/2006/main" xmlns:r="http://schemas.openxmlformats.org/officeDocument/2006/relationships">
+  <p:cSld>
+    <p:spTree>
+      <p:nvGrpSpPr>
+        <p:cNvPr id="1" name=""/>
+        <p:cNvGrpSpPr/>
+        <p:nvPr/>
+      </p:nvGrpSpPr>
+      <p:grpSpPr/>
+      <p:pic>
+        <p:nvPicPr>
+          <p:cNvPr id="2" name="img.hero" descr="表紙の写真"/>
+          <p:cNvPicPr>
+            <a:picLocks noChangeAspect="1"/>
+          </p:cNvPicPr>
+          <p:nvPr/>
+        </p:nvPicPr>
+        <p:blipFill>
+          <a:blip r:embed="rId2"/>
+          <a:srcRect t="7812" b="7812"/>
+          <a:stretch>
+            <a:fillRect/>
+          </a:stretch>
+        </p:blipFill>
+        <p:spPr>
+          <a:xfrm>
+            <a:off x="0" y="0"/>
+            <a:ext cx="12192000" cy="6858000"/>
+          </a:xfrm>
+          <a:custGeom>
+            <a:avLst/>
+            <a:gdLst/>
+            <a:ahLst/>
+            <a:cxnLst/>
+            <a:rect l="l" t="t" r="r" b="b"/>
+            <a:pathLst>
+              <a:path w="12192000" h="6858000">
+                <a:moveTo>
+                  <a:pt x="4737100" y="0"/>
+                </a:moveTo>
+                <a:lnTo>
+                  <a:pt x="12192000" y="0"/>
+                </a:lnTo>
+                <a:lnTo>
+                  <a:pt x="12192000" y="6858000"/>
+                </a:lnTo>
+                <a:lnTo>
+                  <a:pt x="0" y="6858000"/>
+                </a:lnTo>
+                <a:lnTo>
+                  <a:pt x="0" y="4737100"/>
+                </a:lnTo>
+                <a:close/>
+              </a:path>
+            </a:pathLst>
+          </a:custGeom>
+        </p:spPr>
+      </p:pic>
+      <p:sp>
+        <p:nvSpPr>
+          <p:cNvPr id="3" name="deco.headline-band"/>
+          <p:cNvSpPr/>
+          <p:nvPr/>
+        </p:nvSpPr>
+        <p:spPr>
+          <a:xfrm>
+            <a:off x="-107950" y="1631950"/>
+            <a:ext cx="6623050" cy="1073150"/>
+          </a:xfrm>
+          <a:custGeom>
+            <a:avLst/>
+            <a:gdLst/>
+            <a:ahLst/>
+            <a:cxnLst/>
+            <a:rect l="l" t="t" r="r" b="b"/>
+            <a:pathLst>
+              <a:path w="6623050" h="1073150">
+                <a:moveTo>
+                  <a:pt x="0" y="0"/>
+                </a:moveTo>
+                <a:lnTo>
+                  <a:pt x="6623050" y="0"/>
+                </a:lnTo>
+                <a:lnTo>
+                  <a:pt x="5549900" y="1073150"/>
+                </a:lnTo>
+                <a:lnTo>
+                  <a:pt x="0" y="1073150"/>
+                </a:lnTo>
+                <a:close/>
+              </a:path>
+            </a:pathLst>
+          </a:custGeom>
+          <a:solidFill>
+            <a:schemeClr val="tx1">
+              <a:alpha val="85000"/>
+            </a:schemeClr>
+          </a:solidFill>
+          <a:ln>
+            <a:noFill/>
+          </a:ln>
+        </p:spPr>
+      </p:sp>
+      <p:sp>
+        <p:nvSpPr>
+          <p:cNvPr id="4" name="deco.subtitle-plate"/>
+          <p:cNvSpPr/>
+          <p:nvPr/>
+        </p:nvSpPr>
+        <p:spPr>
+          <a:xfrm>
+            <a:off x="5568950" y="1638300"/>
+            <a:ext cx="5505450" cy="1066800"/>
+          </a:xfrm>
+          <a:custGeom>
+            <a:avLst/>
+            <a:gdLst/>
+            <a:ahLst/>
+            <a:cxnLst/>
+            <a:rect l="l" t="t" r="r" b="b"/>
+            <a:pathLst>
+              <a:path w="5505450" h="1066800">
+                <a:moveTo>
+                  <a:pt x="0" y="1066800"/>
+                </a:moveTo>
+                <a:lnTo>
+                  <a:pt x="1073150" y="0"/>
+                </a:lnTo>
+                <a:lnTo>
+                  <a:pt x="5505450" y="0"/>
+                </a:lnTo>
+                <a:lnTo>
+                  <a:pt x="5505450" y="1066800"/>
+                </a:lnTo>
+                <a:close/>
+              </a:path>
+            </a:pathLst>
+          </a:custGeom>
+          <a:solidFill>
+            <a:schemeClr val="bg1"/>
+          </a:solidFill>
+          <a:ln>
+            <a:noFill/>
+          </a:ln>
+        </p:spPr>
+      </p:sp>
+      <p:sp>
+        <p:nvSpPr>
+          <p:cNvPr id="5" name="deco.line-1"/>
+          <p:cNvSpPr/>
+          <p:nvPr/>
+        </p:nvSpPr>
+        <p:spPr>
+          <a:xfrm>
+            <a:off x="2470150" y="527050"/>
+            <a:ext cx="1612900" cy="1479550"/>
+          </a:xfrm>
+          <a:custGeom>
+            <a:avLst/>
+            <a:gdLst/>
+            <a:ahLst/>
+            <a:cxnLst/>
+            <a:rect l="l" t="t" r="r" b="b"/>
+            <a:pathLst>
+              <a:path w="1612900" h="1479550">
+                <a:moveTo>
+                  <a:pt x="0" y="1479550"/>
+                </a:moveTo>
+                <a:lnTo>
+                  <a:pt x="133350" y="1479550"/>
+                </a:lnTo>
+                <a:lnTo>
+                  <a:pt x="1612900" y="0"/>
+                </a:lnTo>
+                <a:lnTo>
+                  <a:pt x="1479550" y="0"/>
+                </a:lnTo>
+                <a:close/>
+              </a:path>
+            </a:pathLst>
+          </a:custGeom>
+          <a:solidFill>
+            <a:schemeClr val="accent1"/>
+          </a:solidFill>
+          <a:ln>
+            <a:noFill/>
+          </a:ln>
+        </p:spPr>
+      </p:sp>
+      <p:sp>
+        <p:nvSpPr>
+          <p:cNvPr id="6" name="deco.end-triangle"/>
+          <p:cNvSpPr/>
+          <p:nvPr/>
+        </p:nvSpPr>
+        <p:spPr>
+          <a:xfrm>
+            <a:off x="10998200" y="5702300"/>
+            <a:ext cx="933450" cy="933450"/>
+          </a:xfrm>
+          <a:custGeom>
+            <a:avLst/>
+            <a:gdLst/>
+            <a:ahLst/>
+            <a:cxnLst/>
+            <a:rect l="l" t="t" r="r" b="b"/>
+            <a:pathLst>
+              <a:path w="933450" h="933450">
+                <a:moveTo>
+                  <a:pt x="933450" y="0"/>
+                </a:moveTo>
+                <a:lnTo>
+                  <a:pt x="933450" y="933450"/>
+                </a:lnTo>
+                <a:lnTo>
+                  <a:pt x="0" y="933450"/>
+                </a:lnTo>
+                <a:close/>
+              </a:path>
+            </a:pathLst>
+          </a:custGeom>
+          <a:solidFill>
+            <a:schemeClr val="accent2"/>
+          </a:solidFill>
+          <a:ln>
+            <a:noFill/>
+          </a:ln>
+        </p:spPr>
+      </p:sp>
+      <p:sp>
+        <p:nvSpPr>
+          <p:cNvPr id="7" name="txt.headline"/>
+          <p:cNvSpPr txBox="1"/>
+          <p:nvPr/>
+        </p:nvSpPr>
+        <p:spPr>
+          <a:xfrm>
+            <a:off x="1212850" y="1663700"/>
+            <a:ext cx="4381500" cy="1016000"/>
+          </a:xfrm>
+          <a:prstGeom prst="rect">
+            <a:avLst/>
+          </a:prstGeom>
+          <a:noFill/>
+        </p:spPr>
+        <p:txBody>
+          <a:bodyPr wrap="square" lIns="0" tIns="0" rIns="0" bIns="0" anchor="t" rtlCol="0">
+            <a:noAutofit/>
+          </a:bodyPr>
+          <a:lstStyle/>
+          <a:p>
+            <a:pPr algn="l" eaLnBrk="1" hangingPunct="1" latinLnBrk="0">
+              <a:lnSpc>
+                <a:spcPts val="4000"/>
+              </a:lnSpc>
+            </a:pPr>
+            <a:r>
+              <a:rPr lang="ja-JP" altLang="en-US" sz="3250" b="0" dirty="0">
+                <a:solidFill>
+                  <a:schemeClr val="bg1"/>
+                </a:solidFill>
+                <a:latin typeface="Noto Serif JP"/>
+                <a:ea typeface="Noto Serif JP"/>
+              </a:rPr>
+              <a:t>ダミー大見出し</a:t>
+            </a:r>
+          </a:p>
+          <a:p>
+            <a:pPr algn="l" eaLnBrk="1" hangingPunct="1" latinLnBrk="0">
+              <a:lnSpc>
+                <a:spcPts val="4000"/>
+              </a:lnSpc>
+            </a:pPr>
+            <a:r>
+              <a:rPr lang="ja-JP" altLang="en-US" sz="3250" b="0" dirty="0">
+                <a:solidFill>
+                  <a:schemeClr val="bg1"/>
+                </a:solidFill>
+                <a:latin typeface="Noto Serif JP"/>
+                <a:ea typeface="Noto Serif JP"/>
+              </a:rPr>
+              <a:t>ダミー大見出し</a:t>
+            </a:r>
+          </a:p>
+        </p:txBody>
+      </p:sp>
+      <p:sp>
+        <p:nvSpPr>
+          <p:cNvPr id="8" name="txt.subtitle"/>
+          <p:cNvSpPr txBox="1"/>
+          <p:nvPr/>
+        </p:nvSpPr>
+        <p:spPr>
+          <a:xfrm>
+            <a:off x="6673850" y="1905000"/>
+            <a:ext cx="5486400" cy="660400"/>
+          </a:xfrm>
+          <a:prstGeom prst="rect">
+            <a:avLst/>
+          </a:prstGeom>
+          <a:noFill/>
+        </p:spPr>
+        <p:txBody>
+          <a:bodyPr wrap="square" lIns="0" tIns="0" rIns="0" bIns="0" anchor="t" rtlCol="0">
+            <a:noAutofit/>
+          </a:bodyPr>
+          <a:lstStyle/>
+          <a:p>
+            <a:pPr algn="l" eaLnBrk="1" hangingPunct="1" latinLnBrk="0">
+              <a:lnSpc>
+                <a:spcPts val="2550"/>
+              </a:lnSpc>
+            </a:pPr>
+            <a:r>
+              <a:rPr lang="ja-JP" altLang="en-US" sz="1500" b="1" dirty="0">
+                <a:solidFill>
+                  <a:schemeClr val="tx1"/>
+                </a:solidFill>
+                <a:latin typeface="Barlow"/>
+                <a:ea typeface="Noto Sans JP"/>
+              </a:rPr>
+              <a:t>ダミー副題</a:t>
+            </a:r>
+          </a:p>
+          <a:p>
+            <a:pPr algn="l" eaLnBrk="1" hangingPunct="1" latinLnBrk="0">
+              <a:lnSpc>
+                <a:spcPts val="2550"/>
+              </a:lnSpc>
+            </a:pPr>
+            <a:r>
+              <a:rPr lang="ja-JP" altLang="en-US" sz="1500" b="1" dirty="0">
+                <a:solidFill>
+                  <a:schemeClr val="tx1"/>
+                </a:solidFill>
+                <a:latin typeface="Barlow"/>
+                <a:ea typeface="Noto Sans JP"/>
+              </a:rPr>
+              <a:t>ダミー副題</a:t>
+            </a:r>
+          </a:p>
+        </p:txBody>
+      </p:sp>
+    </p:spTree>
+  </p:cSld>
+  <p:clrMapOvr>
+    <a:masterClrMapping/>
+  </p:clrMapOvr>
+</p:sld>
+</file>
+
 <file path=ppt/slides/slide2.xml><?xml version="1.0" encoding="utf-8"?>
 <p:sld xmlns:a="http://schemas.openxmlformats.org/drawingml/2006/main" xmlns:p="http://schemas.openxmlformats.org/presentationml/2006/main" xmlns:r="http://schemas.openxmlformats.org/officeDocument/2006/relationships">
   <p:cSld>
@@ -13734,7 +14172,7 @@
 <file path=ppt/theme/theme1.xml><?xml version="1.0" encoding="utf-8"?>
 <a:theme xmlns:a="http://schemas.openxmlformats.org/drawingml/2006/main" name="Office Theme">
   <a:themeElements>
-    <a:clrScheme name="Provisional Green Pink">
+    <a:clrScheme name="Provisional Blue Yellow">
       <a:dk1>
         <a:srgbClr val="000000"/>
       </a:dk1>
@@ -13754,13 +14192,13 @@
         <a:srgbClr val="E5508A"/>
       </a:accent2>
       <a:accent3>
-        <a:srgbClr val="A6D9B9"/>
+        <a:srgbClr val="8FBDF0"/>
       </a:accent3>
       <a:accent4>
-        <a:srgbClr val="0F5A30"/>
+        <a:srgbClr val="003F8A"/>
       </a:accent4>
       <a:accent5>
-        <a:srgbClr val="F9D7E4"/>
+        <a:srgbClr val="F7F8D0"/>
       </a:accent5>
       <a:accent6>
         <a:srgbClr val="9E9E9E"/>

--- a/templates/provisional-green.pptx
+++ b/templates/provisional-green.pptx
@@ -8983,7 +8983,7 @@
         <p:spPr>
           <a:xfrm>
             <a:off x="5568950" y="1638300"/>
-            <a:ext cx="5505450" cy="1066800"/>
+            <a:ext cx="6724650" cy="1066800"/>
           </a:xfrm>
           <a:custGeom>
             <a:avLst/>
@@ -8992,7 +8992,7 @@
             <a:cxnLst/>
             <a:rect l="l" t="t" r="r" b="b"/>
             <a:pathLst>
-              <a:path w="5505450" h="1066800">
+              <a:path w="6724650" h="1066800">
                 <a:moveTo>
                   <a:pt x="0" y="1066800"/>
                 </a:moveTo>
@@ -9000,10 +9000,10 @@
                   <a:pt x="1073150" y="0"/>
                 </a:lnTo>
                 <a:lnTo>
-                  <a:pt x="5505450" y="0"/>
-                </a:lnTo>
-                <a:lnTo>
-                  <a:pt x="5505450" y="1066800"/>
+                  <a:pt x="6724650" y="0"/>
+                </a:lnTo>
+                <a:lnTo>
+                  <a:pt x="6724650" y="1066800"/>
                 </a:lnTo>
                 <a:close/>
               </a:path>
